--- a/docs/홍보/하루차림-발표.pptx
+++ b/docs/홍보/하루차림-발표.pptx
@@ -10155,7 +10155,7 @@
                 <a:ea typeface="Apple SD Gothic Neo"/>
                 <a:cs typeface="Apple SD Gothic Neo"/>
               </a:rPr>
-              <a:t>144</a:t>
+              <a:t>152 개</a:t>
             </a:r>
             <a:r>
               <a:rPr sz="2600" b="1">
@@ -10166,7 +10166,7 @@
                 <a:ea typeface="Apple SD Gothic Neo"/>
                 <a:cs typeface="Apple SD Gothic Neo"/>
               </a:rPr>
-              <a:t> 개</a:t>
+              <a:t/>
             </a:r>
           </a:p>
         </p:txBody>
@@ -10210,7 +10210,7 @@
                 <a:ea typeface="Apple SD Gothic Neo"/>
                 <a:cs typeface="Apple SD Gothic Neo"/>
               </a:rPr>
-              <a:t>영양 규칙 123개 + 약물·음식 상호작용 21개</a:t>
+              <a:t>영양 규칙 124개 + 약물·음식 상호작용 28개</a:t>
             </a:r>
           </a:p>
         </p:txBody>
@@ -10254,7 +10254,7 @@
                 <a:ea typeface="Apple SD Gothic Neo"/>
                 <a:cs typeface="Apple SD Gothic Neo"/>
               </a:rPr>
-              <a:t>79</a:t>
+              <a:t>87종 참고 문헌 — 전부 원문과 대조</a:t>
             </a:r>
             <a:r>
               <a:rPr sz="1500" b="0">
@@ -10265,7 +10265,7 @@
                 <a:ea typeface="Apple SD Gothic Neo"/>
                 <a:cs typeface="Apple SD Gothic Neo"/>
               </a:rPr>
-              <a:t>종 참고 문헌 — 전부 원문과 대조</a:t>
+              <a:t/>
             </a:r>
           </a:p>
           <a:p>
@@ -10286,7 +10286,7 @@
                 <a:ea typeface="Apple SD Gothic Neo"/>
                 <a:cs typeface="Apple SD Gothic Neo"/>
               </a:rPr>
-              <a:t>33</a:t>
+              <a:t>34개 영양제 성분 규칙</a:t>
             </a:r>
             <a:r>
               <a:rPr sz="1500" b="0">
@@ -10297,7 +10297,7 @@
                 <a:ea typeface="Apple SD Gothic Neo"/>
                 <a:cs typeface="Apple SD Gothic Neo"/>
               </a:rPr>
-              <a:t>개 영양제 성분 규칙</a:t>
+              <a:t/>
             </a:r>
           </a:p>
         </p:txBody>
@@ -10341,7 +10341,7 @@
                 <a:ea typeface="Apple SD Gothic Neo"/>
                 <a:cs typeface="Apple SD Gothic Neo"/>
               </a:rPr>
-              <a:t>영양 규칙 123개의 근거 등급 — 화면에 그대로 붙습니다</a:t>
+              <a:t>영양 규칙 124개의 근거 등급 — 화면에 그대로 붙습니다</a:t>
             </a:r>
           </a:p>
         </p:txBody>
@@ -10779,7 +10779,7 @@
                 <a:ea typeface="Apple SD Gothic Neo"/>
                 <a:cs typeface="Apple SD Gothic Neo"/>
               </a:rPr>
-              <a:t>25</a:t>
+              <a:t>21</a:t>
             </a:r>
           </a:p>
         </p:txBody>
@@ -11261,7 +11261,7 @@
                 <a:ea typeface="Apple SD Gothic Neo"/>
                 <a:cs typeface="Apple SD Gothic Neo"/>
               </a:rPr>
-              <a:t>59</a:t>
+              <a:t>64</a:t>
             </a:r>
           </a:p>
         </p:txBody>
@@ -13818,7 +13818,7 @@
                 <a:ea typeface="Apple SD Gothic Neo"/>
                 <a:cs typeface="Apple SD Gothic Neo"/>
               </a:rPr>
-              <a:t>참고 문헌 79종을 다시 읽고 고친 것</a:t>
+              <a:t>참고 문헌 87종을 다시 읽고 고친 것</a:t>
             </a:r>
           </a:p>
         </p:txBody>

--- a/docs/홍보/하루차림-발표.pptx
+++ b/docs/홍보/하루차림-발표.pptx
@@ -10254,7 +10254,7 @@
                 <a:ea typeface="Apple SD Gothic Neo"/>
                 <a:cs typeface="Apple SD Gothic Neo"/>
               </a:rPr>
-              <a:t>87종 참고 문헌 — 전부 원문과 대조</a:t>
+              <a:t>88종 참고 문헌 — 전부 원문과 대조</a:t>
             </a:r>
             <a:r>
               <a:rPr sz="1500" b="0">

--- a/docs/홍보/하루차림-발표.pptx
+++ b/docs/홍보/하루차림-발표.pptx
@@ -10155,7 +10155,7 @@
                 <a:ea typeface="Apple SD Gothic Neo"/>
                 <a:cs typeface="Apple SD Gothic Neo"/>
               </a:rPr>
-              <a:t>152 개</a:t>
+              <a:t>154 개</a:t>
             </a:r>
             <a:r>
               <a:rPr sz="2600" b="1">
@@ -10210,7 +10210,7 @@
                 <a:ea typeface="Apple SD Gothic Neo"/>
                 <a:cs typeface="Apple SD Gothic Neo"/>
               </a:rPr>
-              <a:t>영양 규칙 124개 + 약물·음식 상호작용 28개</a:t>
+              <a:t>영양 규칙 126개 + 약물·음식 상호작용 28개</a:t>
             </a:r>
           </a:p>
         </p:txBody>
@@ -10254,7 +10254,7 @@
                 <a:ea typeface="Apple SD Gothic Neo"/>
                 <a:cs typeface="Apple SD Gothic Neo"/>
               </a:rPr>
-              <a:t>88종 참고 문헌 — 전부 원문과 대조</a:t>
+              <a:t>90종 참고 문헌 — 전부 원문과 대조</a:t>
             </a:r>
             <a:r>
               <a:rPr sz="1500" b="0">
@@ -10341,7 +10341,7 @@
                 <a:ea typeface="Apple SD Gothic Neo"/>
                 <a:cs typeface="Apple SD Gothic Neo"/>
               </a:rPr>
-              <a:t>영양 규칙 124개의 근거 등급 — 화면에 그대로 붙습니다</a:t>
+              <a:t>영양 규칙 126개의 근거 등급 — 화면에 그대로 붙습니다</a:t>
             </a:r>
           </a:p>
         </p:txBody>
@@ -11020,7 +11020,7 @@
                 <a:ea typeface="Apple SD Gothic Neo"/>
                 <a:cs typeface="Apple SD Gothic Neo"/>
               </a:rPr>
-              <a:t>23</a:t>
+              <a:t>25</a:t>
             </a:r>
           </a:p>
         </p:txBody>

--- a/docs/홍보/하루차림-발표.pptx
+++ b/docs/홍보/하루차림-발표.pptx
@@ -10155,7 +10155,7 @@
                 <a:ea typeface="Apple SD Gothic Neo"/>
                 <a:cs typeface="Apple SD Gothic Neo"/>
               </a:rPr>
-              <a:t>154 개</a:t>
+              <a:t>155 개</a:t>
             </a:r>
             <a:r>
               <a:rPr sz="2600" b="1">
@@ -10210,7 +10210,7 @@
                 <a:ea typeface="Apple SD Gothic Neo"/>
                 <a:cs typeface="Apple SD Gothic Neo"/>
               </a:rPr>
-              <a:t>영양 규칙 126개 + 약물·음식 상호작용 28개</a:t>
+              <a:t>영양 규칙 128개 + 약물·음식 상호작용 27개</a:t>
             </a:r>
           </a:p>
         </p:txBody>
@@ -10254,7 +10254,7 @@
                 <a:ea typeface="Apple SD Gothic Neo"/>
                 <a:cs typeface="Apple SD Gothic Neo"/>
               </a:rPr>
-              <a:t>90종 참고 문헌 — 전부 원문과 대조</a:t>
+              <a:t>167종 참고 문헌 — 전부 원문과 대조</a:t>
             </a:r>
             <a:r>
               <a:rPr sz="1500" b="0">
@@ -10286,7 +10286,7 @@
                 <a:ea typeface="Apple SD Gothic Neo"/>
                 <a:cs typeface="Apple SD Gothic Neo"/>
               </a:rPr>
-              <a:t>34개 영양제 성분 규칙</a:t>
+              <a:t>36개 영양제 성분 규칙</a:t>
             </a:r>
             <a:r>
               <a:rPr sz="1500" b="0">
@@ -10341,7 +10341,7 @@
                 <a:ea typeface="Apple SD Gothic Neo"/>
                 <a:cs typeface="Apple SD Gothic Neo"/>
               </a:rPr>
-              <a:t>영양 규칙 126개의 근거 등급 — 화면에 그대로 붙습니다</a:t>
+              <a:t>영양 규칙 128개의 근거 등급 — 화면에 그대로 붙습니다</a:t>
             </a:r>
           </a:p>
         </p:txBody>
@@ -10538,7 +10538,7 @@
                 <a:ea typeface="Apple SD Gothic Neo"/>
                 <a:cs typeface="Apple SD Gothic Neo"/>
               </a:rPr>
-              <a:t>16</a:t>
+              <a:t>10</a:t>
             </a:r>
           </a:p>
         </p:txBody>
@@ -10779,7 +10779,7 @@
                 <a:ea typeface="Apple SD Gothic Neo"/>
                 <a:cs typeface="Apple SD Gothic Neo"/>
               </a:rPr>
-              <a:t>21</a:t>
+              <a:t>14</a:t>
             </a:r>
           </a:p>
         </p:txBody>
@@ -11020,7 +11020,7 @@
                 <a:ea typeface="Apple SD Gothic Neo"/>
                 <a:cs typeface="Apple SD Gothic Neo"/>
               </a:rPr>
-              <a:t>25</a:t>
+              <a:t>39</a:t>
             </a:r>
           </a:p>
         </p:txBody>
@@ -11261,7 +11261,7 @@
                 <a:ea typeface="Apple SD Gothic Neo"/>
                 <a:cs typeface="Apple SD Gothic Neo"/>
               </a:rPr>
-              <a:t>64</a:t>
+              <a:t>65</a:t>
             </a:r>
           </a:p>
         </p:txBody>
@@ -13818,7 +13818,7 @@
                 <a:ea typeface="Apple SD Gothic Neo"/>
                 <a:cs typeface="Apple SD Gothic Neo"/>
               </a:rPr>
-              <a:t>참고 문헌 87종을 다시 읽고 고친 것</a:t>
+              <a:t>참고 문헌을 원문과 다시 읽고 고친 것 (2026년 9월 대조)</a:t>
             </a:r>
           </a:p>
         </p:txBody>

--- a/docs/홍보/하루차림-발표.pptx
+++ b/docs/홍보/하루차림-발표.pptx
@@ -10155,7 +10155,7 @@
                 <a:ea typeface="Apple SD Gothic Neo"/>
                 <a:cs typeface="Apple SD Gothic Neo"/>
               </a:rPr>
-              <a:t>155 개</a:t>
+              <a:t>158 개</a:t>
             </a:r>
             <a:r>
               <a:rPr sz="2600" b="1">
@@ -10210,7 +10210,7 @@
                 <a:ea typeface="Apple SD Gothic Neo"/>
                 <a:cs typeface="Apple SD Gothic Neo"/>
               </a:rPr>
-              <a:t>영양 규칙 128개 + 약물·음식 상호작용 27개</a:t>
+              <a:t>영양 규칙 130개 + 약물·음식 상호작용 28개</a:t>
             </a:r>
           </a:p>
         </p:txBody>
@@ -10254,7 +10254,7 @@
                 <a:ea typeface="Apple SD Gothic Neo"/>
                 <a:cs typeface="Apple SD Gothic Neo"/>
               </a:rPr>
-              <a:t>167종 참고 문헌 — 전부 원문과 대조</a:t>
+              <a:t>168종 참고 문헌 — 전부 원문과 대조</a:t>
             </a:r>
             <a:r>
               <a:rPr sz="1500" b="0">
@@ -10341,7 +10341,7 @@
                 <a:ea typeface="Apple SD Gothic Neo"/>
                 <a:cs typeface="Apple SD Gothic Neo"/>
               </a:rPr>
-              <a:t>영양 규칙 128개의 근거 등급 — 화면에 그대로 붙습니다</a:t>
+              <a:t>영양 규칙 130개의 근거 등급 — 화면에 그대로 붙습니다</a:t>
             </a:r>
           </a:p>
         </p:txBody>
@@ -10779,7 +10779,7 @@
                 <a:ea typeface="Apple SD Gothic Neo"/>
                 <a:cs typeface="Apple SD Gothic Neo"/>
               </a:rPr>
-              <a:t>14</a:t>
+              <a:t>15</a:t>
             </a:r>
           </a:p>
         </p:txBody>
@@ -11020,7 +11020,7 @@
                 <a:ea typeface="Apple SD Gothic Neo"/>
                 <a:cs typeface="Apple SD Gothic Neo"/>
               </a:rPr>
-              <a:t>39</a:t>
+              <a:t>40</a:t>
             </a:r>
           </a:p>
         </p:txBody>

--- a/docs/홍보/하루차림-발표.pptx
+++ b/docs/홍보/하루차림-발표.pptx
@@ -10254,7 +10254,7 @@
                 <a:ea typeface="Apple SD Gothic Neo"/>
                 <a:cs typeface="Apple SD Gothic Neo"/>
               </a:rPr>
-              <a:t>168종 참고 문헌 — 전부 원문과 대조</a:t>
+              <a:t>172종 참고 문헌 — 전부 원문과 대조</a:t>
             </a:r>
             <a:r>
               <a:rPr sz="1500" b="0">

--- a/docs/홍보/하루차림-발표.pptx
+++ b/docs/홍보/하루차림-발표.pptx
@@ -13,6 +13,8 @@
     <p:sldId id="261" r:id="rId12"/>
     <p:sldId id="262" r:id="rId13"/>
     <p:sldId id="263" r:id="rId14"/>
+    <p:sldId id="268" r:id="rId19"/>
+    <p:sldId id="269" r:id="rId20"/>
     <p:sldId id="264" r:id="rId15"/>
     <p:sldId id="265" r:id="rId16"/>
     <p:sldId id="266" r:id="rId17"/>
@@ -3116,7 +3118,7 @@
         <p:spPr>
           <a:xfrm>
             <a:off x="0" y="0"/>
-            <a:ext cx="1015974" cy="45720"/>
+            <a:ext cx="870835" cy="45720"/>
           </a:xfrm>
           <a:prstGeom prst="rect">
             <a:avLst/>
@@ -3190,7 +3192,7 @@
                 <a:ea typeface="Apple SD Gothic Neo"/>
                 <a:cs typeface="Apple SD Gothic Neo"/>
               </a:rPr>
-              <a:t>01 / 12</a:t>
+              <a:t>01 / 14</a:t>
             </a:r>
           </a:p>
         </p:txBody>
@@ -3234,7 +3236,7 @@
                 <a:ea typeface="Apple SD Gothic Neo"/>
                 <a:cs typeface="Apple SD Gothic Neo"/>
               </a:rPr>
-              <a:t>발표 자료 · 2026년 9월</a:t>
+              <a:t>발표 자료 · 2026년 10월</a:t>
             </a:r>
           </a:p>
         </p:txBody>
@@ -3730,7 +3732,7 @@
         <p:spPr>
           <a:xfrm>
             <a:off x="0" y="0"/>
-            <a:ext cx="10159746" cy="45720"/>
+            <a:ext cx="10450024" cy="45720"/>
           </a:xfrm>
           <a:prstGeom prst="rect">
             <a:avLst/>
@@ -3804,7 +3806,7 @@
                 <a:ea typeface="Apple SD Gothic Neo"/>
                 <a:cs typeface="Apple SD Gothic Neo"/>
               </a:rPr>
-              <a:t>10 / 12</a:t>
+              <a:t>12 / 14</a:t>
             </a:r>
           </a:p>
         </p:txBody>
@@ -3848,7 +3850,7 @@
                 <a:ea typeface="Apple SD Gothic Neo"/>
                 <a:cs typeface="Apple SD Gothic Neo"/>
               </a:rPr>
-              <a:t>여덟 · 개인정보</a:t>
+              <a:t>열 · 개인정보</a:t>
             </a:r>
           </a:p>
         </p:txBody>
@@ -4732,7 +4734,7 @@
         <p:spPr>
           <a:xfrm>
             <a:off x="0" y="0"/>
-            <a:ext cx="11175720" cy="45720"/>
+            <a:ext cx="11320859" cy="45720"/>
           </a:xfrm>
           <a:prstGeom prst="rect">
             <a:avLst/>
@@ -4806,7 +4808,7 @@
                 <a:ea typeface="Apple SD Gothic Neo"/>
                 <a:cs typeface="Apple SD Gothic Neo"/>
               </a:rPr>
-              <a:t>11 / 12</a:t>
+              <a:t>13 / 14</a:t>
             </a:r>
           </a:p>
         </p:txBody>
@@ -4850,7 +4852,7 @@
                 <a:ea typeface="Apple SD Gothic Neo"/>
                 <a:cs typeface="Apple SD Gothic Neo"/>
               </a:rPr>
-              <a:t>아홉 · 원칙</a:t>
+              <a:t>열하나 · 원칙</a:t>
             </a:r>
           </a:p>
         </p:txBody>
@@ -5724,7 +5726,7 @@
                 <a:ea typeface="Apple SD Gothic Neo"/>
                 <a:cs typeface="Apple SD Gothic Neo"/>
               </a:rPr>
-              <a:t>12 / 12</a:t>
+              <a:t>14 / 14</a:t>
             </a:r>
           </a:p>
         </p:txBody>
@@ -6410,6 +6412,1522 @@
 </p:sld>
 </file>
 
+<file path=ppt/slides/slide13.xml><?xml version="1.0" encoding="utf-8"?>
+<p:sld xmlns:a="http://schemas.openxmlformats.org/drawingml/2006/main" xmlns:p="http://schemas.openxmlformats.org/presentationml/2006/main" xmlns:r="http://schemas.openxmlformats.org/officeDocument/2006/relationships">
+  <p:cSld>
+    <p:spTree>
+      <p:nvGrpSpPr>
+        <p:cNvPr id="1" name=""/>
+        <p:cNvGrpSpPr/>
+        <p:nvPr/>
+      </p:nvGrpSpPr>
+      <p:grpSpPr/>
+      <p:sp>
+        <p:nvSpPr>
+          <p:cNvPr id="2" name="Rectangle 1"/>
+          <p:cNvSpPr/>
+          <p:nvPr/>
+        </p:nvSpPr>
+        <p:spPr>
+          <a:xfrm>
+            <a:off x="0" y="0"/>
+            <a:ext cx="7837518" cy="45720"/>
+          </a:xfrm>
+          <a:prstGeom prst="rect">
+            <a:avLst/>
+          </a:prstGeom>
+          <a:solidFill>
+            <a:srgbClr val="4B6936"/>
+          </a:solidFill>
+          <a:ln>
+            <a:noFill/>
+          </a:ln>
+          <a:effectLst/>
+        </p:spPr>
+        <p:style>
+          <a:lnRef idx="1">
+            <a:schemeClr val="accent1"/>
+          </a:lnRef>
+          <a:fillRef idx="3">
+            <a:schemeClr val="accent1"/>
+          </a:fillRef>
+          <a:effectRef idx="2">
+            <a:schemeClr val="accent1"/>
+          </a:effectRef>
+          <a:fontRef idx="minor">
+            <a:schemeClr val="lt1"/>
+          </a:fontRef>
+        </p:style>
+        <p:txBody>
+          <a:bodyPr rtlCol="0" anchor="ctr"/>
+          <a:lstStyle/>
+          <a:p>
+            <a:pPr algn="ctr"/>
+          </a:p>
+        </p:txBody>
+      </p:sp>
+      <p:sp>
+        <p:nvSpPr>
+          <p:cNvPr id="3" name="TextBox 2"/>
+          <p:cNvSpPr txBox="1"/>
+          <p:nvPr/>
+        </p:nvSpPr>
+        <p:spPr>
+          <a:xfrm>
+            <a:off x="10561320" y="274320"/>
+            <a:ext cx="914400" cy="274320"/>
+          </a:xfrm>
+          <a:prstGeom prst="rect">
+            <a:avLst/>
+          </a:prstGeom>
+          <a:noFill/>
+        </p:spPr>
+        <p:txBody>
+          <a:bodyPr wrap="square" lIns="0" rIns="0" tIns="0" bIns="0" anchor="t">
+            <a:spAutoFit/>
+          </a:bodyPr>
+          <a:lstStyle/>
+          <a:p>
+            <a:pPr algn="r">
+              <a:lnSpc>
+                <a:spcPct val="115000"/>
+              </a:lnSpc>
+              <a:spcAft>
+                <a:spcPts val="0"/>
+              </a:spcAft>
+            </a:pPr>
+            <a:r>
+              <a:rPr sz="1000" b="0">
+                <a:solidFill>
+                  <a:srgbClr val="7A7566"/>
+                </a:solidFill>
+                <a:latin typeface="Apple SD Gothic Neo"/>
+                <a:ea typeface="Apple SD Gothic Neo"/>
+                <a:cs typeface="Apple SD Gothic Neo"/>
+              </a:rPr>
+              <a:t>09 / 14</a:t>
+            </a:r>
+          </a:p>
+        </p:txBody>
+      </p:sp>
+      <p:sp>
+        <p:nvSpPr>
+          <p:cNvPr id="4" name="TextBox 3"/>
+          <p:cNvSpPr txBox="1"/>
+          <p:nvPr/>
+        </p:nvSpPr>
+        <p:spPr>
+          <a:xfrm>
+            <a:off x="731520" y="685800"/>
+            <a:ext cx="7315200" cy="320040"/>
+          </a:xfrm>
+          <a:prstGeom prst="rect">
+            <a:avLst/>
+          </a:prstGeom>
+          <a:noFill/>
+        </p:spPr>
+        <p:txBody>
+          <a:bodyPr wrap="square" lIns="0" rIns="0" tIns="0" bIns="0" anchor="t">
+            <a:spAutoFit/>
+          </a:bodyPr>
+          <a:lstStyle/>
+          <a:p>
+            <a:pPr algn="l">
+              <a:lnSpc>
+                <a:spcPct val="115000"/>
+              </a:lnSpc>
+              <a:spcAft>
+                <a:spcPts val="0"/>
+              </a:spcAft>
+            </a:pPr>
+            <a:r>
+              <a:rPr sz="1200" b="1">
+                <a:solidFill>
+                  <a:srgbClr val="4B6936"/>
+                </a:solidFill>
+                <a:latin typeface="Apple SD Gothic Neo"/>
+                <a:ea typeface="Apple SD Gothic Neo"/>
+                <a:cs typeface="Apple SD Gothic Neo"/>
+              </a:rPr>
+              <a:t>일곱 · 며칠치와 장보기</a:t>
+            </a:r>
+          </a:p>
+        </p:txBody>
+      </p:sp>
+      <p:sp>
+        <p:nvSpPr>
+          <p:cNvPr id="5" name="TextBox 4"/>
+          <p:cNvSpPr txBox="1"/>
+          <p:nvPr/>
+        </p:nvSpPr>
+        <p:spPr>
+          <a:xfrm>
+            <a:off x="731520" y="1051560"/>
+            <a:ext cx="10515600" cy="731520"/>
+          </a:xfrm>
+          <a:prstGeom prst="rect">
+            <a:avLst/>
+          </a:prstGeom>
+          <a:noFill/>
+        </p:spPr>
+        <p:txBody>
+          <a:bodyPr wrap="square" lIns="0" rIns="0" tIns="0" bIns="0" anchor="t">
+            <a:spAutoFit/>
+          </a:bodyPr>
+          <a:lstStyle/>
+          <a:p>
+            <a:pPr algn="l">
+              <a:lnSpc>
+                <a:spcPct val="115000"/>
+              </a:lnSpc>
+              <a:spcAft>
+                <a:spcPts val="0"/>
+              </a:spcAft>
+            </a:pPr>
+            <a:r>
+              <a:rPr sz="3000" b="1">
+                <a:solidFill>
+                  <a:srgbClr val="282621"/>
+                </a:solidFill>
+                <a:latin typeface="Apple SD Gothic Neo"/>
+                <a:ea typeface="Apple SD Gothic Neo"/>
+                <a:cs typeface="Apple SD Gothic Neo"/>
+              </a:rPr>
+              <a:t>닷새까지 한 번에 — 식단과 1인분 장보기 목록</a:t>
+            </a:r>
+          </a:p>
+        </p:txBody>
+      </p:sp>
+      <p:sp>
+        <p:nvSpPr>
+          <p:cNvPr id="6" name="Rectangle 5"/>
+          <p:cNvSpPr/>
+          <p:nvPr/>
+        </p:nvSpPr>
+        <p:spPr>
+          <a:xfrm>
+            <a:off x="731520" y="2148840"/>
+            <a:ext cx="4160520" cy="54864"/>
+          </a:xfrm>
+          <a:prstGeom prst="rect">
+            <a:avLst/>
+          </a:prstGeom>
+          <a:solidFill>
+            <a:srgbClr val="4B6936"/>
+          </a:solidFill>
+          <a:ln>
+            <a:noFill/>
+          </a:ln>
+          <a:effectLst/>
+        </p:spPr>
+        <p:style>
+          <a:lnRef idx="1">
+            <a:schemeClr val="accent1"/>
+          </a:lnRef>
+          <a:fillRef idx="3">
+            <a:schemeClr val="accent1"/>
+          </a:fillRef>
+          <a:effectRef idx="2">
+            <a:schemeClr val="accent1"/>
+          </a:effectRef>
+          <a:fontRef idx="minor">
+            <a:schemeClr val="lt1"/>
+          </a:fontRef>
+        </p:style>
+        <p:txBody>
+          <a:bodyPr rtlCol="0" anchor="ctr"/>
+          <a:lstStyle/>
+          <a:p>
+            <a:pPr algn="ctr"/>
+          </a:p>
+        </p:txBody>
+      </p:sp>
+      <p:sp>
+        <p:nvSpPr>
+          <p:cNvPr id="7" name="TextBox 6"/>
+          <p:cNvSpPr txBox="1"/>
+          <p:nvPr/>
+        </p:nvSpPr>
+        <p:spPr>
+          <a:xfrm>
+            <a:off x="731520" y="2377440"/>
+            <a:ext cx="4160520" cy="3291840"/>
+          </a:xfrm>
+          <a:prstGeom prst="rect">
+            <a:avLst/>
+          </a:prstGeom>
+          <a:noFill/>
+        </p:spPr>
+        <p:txBody>
+          <a:bodyPr wrap="square" lIns="0" rIns="0" tIns="0" bIns="0" anchor="t">
+            <a:spAutoFit/>
+          </a:bodyPr>
+          <a:lstStyle/>
+          <a:p>
+            <a:pPr algn="l">
+              <a:lnSpc>
+                <a:spcPct val="130000"/>
+              </a:lnSpc>
+              <a:spcAft>
+                <a:spcPts val="1000"/>
+              </a:spcAft>
+            </a:pPr>
+            <a:r>
+              <a:rPr sz="2100" b="1">
+                <a:solidFill>
+                  <a:srgbClr val="324326"/>
+                </a:solidFill>
+                <a:latin typeface="Apple SD Gothic Neo"/>
+                <a:ea typeface="Apple SD Gothic Neo"/>
+                <a:cs typeface="Apple SD Gothic Neo"/>
+              </a:rPr>
+              <a:t>며칠치 식단</a:t>
+            </a:r>
+          </a:p>
+          <a:p>
+            <a:pPr algn="l">
+              <a:lnSpc>
+                <a:spcPct val="130000"/>
+              </a:lnSpc>
+              <a:spcAft>
+                <a:spcPts val="600"/>
+              </a:spcAft>
+            </a:pPr>
+            <a:r>
+              <a:rPr sz="1300" b="0">
+                <a:solidFill>
+                  <a:srgbClr val="48453C"/>
+                </a:solidFill>
+                <a:latin typeface="Apple SD Gothic Neo"/>
+                <a:ea typeface="Apple SD Gothic Neo"/>
+                <a:cs typeface="Apple SD Gothic Neo"/>
+              </a:rPr>
+              <a:t>· 1~5일 한 번에, 날마다 다른 상</a:t>
+            </a:r>
+          </a:p>
+          <a:p>
+            <a:pPr algn="l">
+              <a:lnSpc>
+                <a:spcPct val="130000"/>
+              </a:lnSpc>
+              <a:spcAft>
+                <a:spcPts val="600"/>
+              </a:spcAft>
+            </a:pPr>
+            <a:r>
+              <a:rPr sz="1300" b="0">
+                <a:solidFill>
+                  <a:srgbClr val="48453C"/>
+                </a:solidFill>
+                <a:latin typeface="Apple SD Gothic Neo"/>
+                <a:ea typeface="Apple SD Gothic Neo"/>
+                <a:cs typeface="Apple SD Gothic Neo"/>
+              </a:rPr>
+              <a:t>· 생선·고기 든 날은 앞에</a:t>
+            </a:r>
+          </a:p>
+          <a:p>
+            <a:pPr algn="l">
+              <a:lnSpc>
+                <a:spcPct val="130000"/>
+              </a:lnSpc>
+              <a:spcAft>
+                <a:spcPts val="600"/>
+              </a:spcAft>
+            </a:pPr>
+            <a:r>
+              <a:rPr sz="1300" b="0">
+                <a:solidFill>
+                  <a:srgbClr val="48453C"/>
+                </a:solidFill>
+                <a:latin typeface="Apple SD Gothic Neo"/>
+                <a:ea typeface="Apple SD Gothic Neo"/>
+                <a:cs typeface="Apple SD Gothic Neo"/>
+              </a:rPr>
+              <a:t>· 국·조림은 2인분 끓여 이틀에</a:t>
+            </a:r>
+          </a:p>
+          <a:p>
+            <a:pPr algn="l">
+              <a:lnSpc>
+                <a:spcPct val="130000"/>
+              </a:lnSpc>
+              <a:spcAft>
+                <a:spcPts val="600"/>
+              </a:spcAft>
+            </a:pPr>
+            <a:r>
+              <a:rPr sz="1300" b="0">
+                <a:solidFill>
+                  <a:srgbClr val="48453C"/>
+                </a:solidFill>
+                <a:latin typeface="Apple SD Gothic Neo"/>
+                <a:ea typeface="Apple SD Gothic Neo"/>
+                <a:cs typeface="Apple SD Gothic Neo"/>
+              </a:rPr>
+              <a:t>· 앞날 재료로 만들 수 있는 요리 우선 — 재료 13 % 적게</a:t>
+            </a:r>
+          </a:p>
+        </p:txBody>
+      </p:sp>
+      <p:sp>
+        <p:nvSpPr>
+          <p:cNvPr id="8" name="Rectangle 7"/>
+          <p:cNvSpPr/>
+          <p:nvPr/>
+        </p:nvSpPr>
+        <p:spPr>
+          <a:xfrm>
+            <a:off x="5212080" y="2148840"/>
+            <a:ext cx="2971800" cy="54864"/>
+          </a:xfrm>
+          <a:prstGeom prst="rect">
+            <a:avLst/>
+          </a:prstGeom>
+          <a:solidFill>
+            <a:srgbClr val="E2DFD3"/>
+          </a:solidFill>
+          <a:ln>
+            <a:noFill/>
+          </a:ln>
+          <a:effectLst/>
+        </p:spPr>
+        <p:style>
+          <a:lnRef idx="1">
+            <a:schemeClr val="accent1"/>
+          </a:lnRef>
+          <a:fillRef idx="3">
+            <a:schemeClr val="accent1"/>
+          </a:fillRef>
+          <a:effectRef idx="2">
+            <a:schemeClr val="accent1"/>
+          </a:effectRef>
+          <a:fontRef idx="minor">
+            <a:schemeClr val="lt1"/>
+          </a:fontRef>
+        </p:style>
+        <p:txBody>
+          <a:bodyPr rtlCol="0" anchor="ctr"/>
+          <a:lstStyle/>
+          <a:p>
+            <a:pPr algn="ctr"/>
+          </a:p>
+        </p:txBody>
+      </p:sp>
+      <p:sp>
+        <p:nvSpPr>
+          <p:cNvPr id="9" name="TextBox 8"/>
+          <p:cNvSpPr txBox="1"/>
+          <p:nvPr/>
+        </p:nvSpPr>
+        <p:spPr>
+          <a:xfrm>
+            <a:off x="5212080" y="2377440"/>
+            <a:ext cx="2971800" cy="3291840"/>
+          </a:xfrm>
+          <a:prstGeom prst="rect">
+            <a:avLst/>
+          </a:prstGeom>
+          <a:noFill/>
+        </p:spPr>
+        <p:txBody>
+          <a:bodyPr wrap="square" lIns="0" rIns="0" tIns="0" bIns="0" anchor="t">
+            <a:spAutoFit/>
+          </a:bodyPr>
+          <a:lstStyle/>
+          <a:p>
+            <a:pPr algn="l">
+              <a:lnSpc>
+                <a:spcPct val="130000"/>
+              </a:lnSpc>
+              <a:spcAft>
+                <a:spcPts val="1000"/>
+              </a:spcAft>
+            </a:pPr>
+            <a:r>
+              <a:rPr sz="1700" b="1">
+                <a:solidFill>
+                  <a:srgbClr val="282621"/>
+                </a:solidFill>
+                <a:latin typeface="Apple SD Gothic Neo"/>
+                <a:ea typeface="Apple SD Gothic Neo"/>
+                <a:cs typeface="Apple SD Gothic Neo"/>
+              </a:rPr>
+              <a:t>장보기 목록</a:t>
+            </a:r>
+          </a:p>
+          <a:p>
+            <a:pPr algn="l">
+              <a:lnSpc>
+                <a:spcPct val="130000"/>
+              </a:lnSpc>
+              <a:spcAft>
+                <a:spcPts val="600"/>
+              </a:spcAft>
+            </a:pPr>
+            <a:r>
+              <a:rPr sz="1300" b="0">
+                <a:solidFill>
+                  <a:srgbClr val="48453C"/>
+                </a:solidFill>
+                <a:latin typeface="Apple SD Gothic Neo"/>
+                <a:ea typeface="Apple SD Gothic Neo"/>
+                <a:cs typeface="Apple SD Gothic Neo"/>
+              </a:rPr>
+              <a:t>1인분 양 · 흔한 포장 단위(두부 1모) · 냉장 보관 기간을 한 줄에.</a:t>
+            </a:r>
+          </a:p>
+          <a:p>
+            <a:pPr algn="l">
+              <a:lnSpc>
+                <a:spcPct val="130000"/>
+              </a:lnSpc>
+              <a:spcAft>
+                <a:spcPts val="600"/>
+              </a:spcAft>
+            </a:pPr>
+            <a:r>
+              <a:rPr sz="1300" b="0">
+                <a:solidFill>
+                  <a:srgbClr val="48453C"/>
+                </a:solidFill>
+                <a:latin typeface="Apple SD Gothic Neo"/>
+                <a:ea typeface="Apple SD Gothic Neo"/>
+                <a:cs typeface="Apple SD Gothic Neo"/>
+              </a:rPr>
+              <a:t>집에 있는 재료는 빼고, 산 것은 눌러 표시. 복사·보내기로 옮깁니다.</a:t>
+            </a:r>
+          </a:p>
+        </p:txBody>
+      </p:sp>
+      <p:sp>
+        <p:nvSpPr>
+          <p:cNvPr id="10" name="Rectangle 9"/>
+          <p:cNvSpPr/>
+          <p:nvPr/>
+        </p:nvSpPr>
+        <p:spPr>
+          <a:xfrm>
+            <a:off x="8458200" y="2148840"/>
+            <a:ext cx="2999232" cy="54864"/>
+          </a:xfrm>
+          <a:prstGeom prst="rect">
+            <a:avLst/>
+          </a:prstGeom>
+          <a:solidFill>
+            <a:srgbClr val="E2DFD3"/>
+          </a:solidFill>
+          <a:ln>
+            <a:noFill/>
+          </a:ln>
+          <a:effectLst/>
+        </p:spPr>
+        <p:style>
+          <a:lnRef idx="1">
+            <a:schemeClr val="accent1"/>
+          </a:lnRef>
+          <a:fillRef idx="3">
+            <a:schemeClr val="accent1"/>
+          </a:fillRef>
+          <a:effectRef idx="2">
+            <a:schemeClr val="accent1"/>
+          </a:effectRef>
+          <a:fontRef idx="minor">
+            <a:schemeClr val="lt1"/>
+          </a:fontRef>
+        </p:style>
+        <p:txBody>
+          <a:bodyPr rtlCol="0" anchor="ctr"/>
+          <a:lstStyle/>
+          <a:p>
+            <a:pPr algn="ctr"/>
+          </a:p>
+        </p:txBody>
+      </p:sp>
+      <p:sp>
+        <p:nvSpPr>
+          <p:cNvPr id="11" name="TextBox 10"/>
+          <p:cNvSpPr txBox="1"/>
+          <p:nvPr/>
+        </p:nvSpPr>
+        <p:spPr>
+          <a:xfrm>
+            <a:off x="8458200" y="2377440"/>
+            <a:ext cx="2999232" cy="3291840"/>
+          </a:xfrm>
+          <a:prstGeom prst="rect">
+            <a:avLst/>
+          </a:prstGeom>
+          <a:noFill/>
+        </p:spPr>
+        <p:txBody>
+          <a:bodyPr wrap="square" lIns="0" rIns="0" tIns="0" bIns="0" anchor="t">
+            <a:spAutoFit/>
+          </a:bodyPr>
+          <a:lstStyle/>
+          <a:p>
+            <a:pPr algn="l">
+              <a:lnSpc>
+                <a:spcPct val="130000"/>
+              </a:lnSpc>
+              <a:spcAft>
+                <a:spcPts val="1000"/>
+              </a:spcAft>
+            </a:pPr>
+            <a:r>
+              <a:rPr sz="1700" b="1">
+                <a:solidFill>
+                  <a:srgbClr val="282621"/>
+                </a:solidFill>
+                <a:latin typeface="Apple SD Gothic Neo"/>
+                <a:ea typeface="Apple SD Gothic Neo"/>
+                <a:cs typeface="Apple SD Gothic Neo"/>
+              </a:rPr>
+              <a:t>식단표 저장 · 인쇄</a:t>
+            </a:r>
+          </a:p>
+          <a:p>
+            <a:pPr algn="l">
+              <a:lnSpc>
+                <a:spcPct val="130000"/>
+              </a:lnSpc>
+              <a:spcAft>
+                <a:spcPts val="600"/>
+              </a:spcAft>
+            </a:pPr>
+            <a:r>
+              <a:rPr sz="1300" b="0">
+                <a:solidFill>
+                  <a:srgbClr val="48453C"/>
+                </a:solidFill>
+                <a:latin typeface="Apple SD Gothic Neo"/>
+                <a:ea typeface="Apple SD Gothic Neo"/>
+                <a:cs typeface="Apple SD Gothic Neo"/>
+              </a:rPr>
+              <a:t>날짜 × 끼니 표를 큰 글씨 그림으로 만들어 냉장고에 붙입니다.</a:t>
+            </a:r>
+          </a:p>
+          <a:p>
+            <a:pPr algn="l">
+              <a:lnSpc>
+                <a:spcPct val="130000"/>
+              </a:lnSpc>
+              <a:spcAft>
+                <a:spcPts val="600"/>
+              </a:spcAft>
+            </a:pPr>
+            <a:r>
+              <a:rPr sz="1300" b="0">
+                <a:solidFill>
+                  <a:srgbClr val="48453C"/>
+                </a:solidFill>
+                <a:latin typeface="Apple SD Gothic Neo"/>
+                <a:ea typeface="Apple SD Gothic Neo"/>
+                <a:cs typeface="Apple SD Gothic Neo"/>
+              </a:rPr>
+              <a:t>인쇄는 표와 장보기 목록을 A4 한 장에 맞춥니다.</a:t>
+            </a:r>
+          </a:p>
+        </p:txBody>
+      </p:sp>
+      <p:sp>
+        <p:nvSpPr>
+          <p:cNvPr id="12" name="Rectangle 11"/>
+          <p:cNvSpPr/>
+          <p:nvPr/>
+        </p:nvSpPr>
+        <p:spPr>
+          <a:xfrm>
+            <a:off x="731520" y="6236208"/>
+            <a:ext cx="10725912" cy="10972"/>
+          </a:xfrm>
+          <a:prstGeom prst="rect">
+            <a:avLst/>
+          </a:prstGeom>
+          <a:solidFill>
+            <a:srgbClr val="E2DFD3"/>
+          </a:solidFill>
+          <a:ln>
+            <a:noFill/>
+          </a:ln>
+          <a:effectLst/>
+        </p:spPr>
+        <p:style>
+          <a:lnRef idx="1">
+            <a:schemeClr val="accent1"/>
+          </a:lnRef>
+          <a:fillRef idx="3">
+            <a:schemeClr val="accent1"/>
+          </a:fillRef>
+          <a:effectRef idx="2">
+            <a:schemeClr val="accent1"/>
+          </a:effectRef>
+          <a:fontRef idx="minor">
+            <a:schemeClr val="lt1"/>
+          </a:fontRef>
+        </p:style>
+        <p:txBody>
+          <a:bodyPr rtlCol="0" anchor="ctr"/>
+          <a:lstStyle/>
+          <a:p>
+            <a:pPr algn="ctr"/>
+          </a:p>
+        </p:txBody>
+      </p:sp>
+      <p:sp>
+        <p:nvSpPr>
+          <p:cNvPr id="13" name="TextBox 12"/>
+          <p:cNvSpPr txBox="1"/>
+          <p:nvPr/>
+        </p:nvSpPr>
+        <p:spPr>
+          <a:xfrm>
+            <a:off x="731520" y="6327648"/>
+            <a:ext cx="1828800" cy="274320"/>
+          </a:xfrm>
+          <a:prstGeom prst="rect">
+            <a:avLst/>
+          </a:prstGeom>
+          <a:noFill/>
+        </p:spPr>
+        <p:txBody>
+          <a:bodyPr wrap="square" lIns="0" rIns="0" tIns="0" bIns="0" anchor="t">
+            <a:spAutoFit/>
+          </a:bodyPr>
+          <a:lstStyle/>
+          <a:p>
+            <a:pPr algn="l">
+              <a:lnSpc>
+                <a:spcPct val="115000"/>
+              </a:lnSpc>
+              <a:spcAft>
+                <a:spcPts val="0"/>
+              </a:spcAft>
+            </a:pPr>
+            <a:r>
+              <a:rPr sz="1000" b="1">
+                <a:solidFill>
+                  <a:srgbClr val="4B6936"/>
+                </a:solidFill>
+                <a:latin typeface="Apple SD Gothic Neo"/>
+                <a:ea typeface="Apple SD Gothic Neo"/>
+                <a:cs typeface="Apple SD Gothic Neo"/>
+              </a:rPr>
+              <a:t>하루차림</a:t>
+            </a:r>
+          </a:p>
+        </p:txBody>
+      </p:sp>
+      <p:sp>
+        <p:nvSpPr>
+          <p:cNvPr id="14" name="TextBox 13"/>
+          <p:cNvSpPr txBox="1"/>
+          <p:nvPr/>
+        </p:nvSpPr>
+        <p:spPr>
+          <a:xfrm>
+            <a:off x="2560320" y="6327648"/>
+            <a:ext cx="8897112" cy="274320"/>
+          </a:xfrm>
+          <a:prstGeom prst="rect">
+            <a:avLst/>
+          </a:prstGeom>
+          <a:noFill/>
+        </p:spPr>
+        <p:txBody>
+          <a:bodyPr wrap="square" lIns="0" rIns="0" tIns="0" bIns="0" anchor="t">
+            <a:spAutoFit/>
+          </a:bodyPr>
+          <a:lstStyle/>
+          <a:p>
+            <a:pPr algn="r">
+              <a:lnSpc>
+                <a:spcPct val="115000"/>
+              </a:lnSpc>
+              <a:spcAft>
+                <a:spcPts val="0"/>
+              </a:spcAft>
+            </a:pPr>
+            <a:r>
+              <a:rPr sz="1000" b="0">
+                <a:solidFill>
+                  <a:srgbClr val="7A7566"/>
+                </a:solidFill>
+                <a:latin typeface="Apple SD Gothic Neo"/>
+                <a:ea typeface="Apple SD Gothic Neo"/>
+                <a:cs typeface="Apple SD Gothic Neo"/>
+              </a:rPr>
+              <a:t>5일까지 — 고기·생선을 냉장으로 신선하게 둘 수 있는 기간 · 보관 기간은 미국 FoodSafety.gov·FoodKeeper 원문 대조</a:t>
+            </a:r>
+          </a:p>
+        </p:txBody>
+      </p:sp>
+    </p:spTree>
+  </p:cSld>
+  <p:clrMapOvr>
+    <a:masterClrMapping/>
+  </p:clrMapOvr>
+</p:sld>
+</file>
+
+<file path=ppt/slides/slide14.xml><?xml version="1.0" encoding="utf-8"?>
+<p:sld xmlns:a="http://schemas.openxmlformats.org/drawingml/2006/main" xmlns:p="http://schemas.openxmlformats.org/presentationml/2006/main" xmlns:r="http://schemas.openxmlformats.org/officeDocument/2006/relationships">
+  <p:cSld>
+    <p:spTree>
+      <p:nvGrpSpPr>
+        <p:cNvPr id="1" name=""/>
+        <p:cNvGrpSpPr/>
+        <p:nvPr/>
+      </p:nvGrpSpPr>
+      <p:grpSpPr/>
+      <p:sp>
+        <p:nvSpPr>
+          <p:cNvPr id="2" name="Rectangle 1"/>
+          <p:cNvSpPr/>
+          <p:nvPr/>
+        </p:nvSpPr>
+        <p:spPr>
+          <a:xfrm>
+            <a:off x="0" y="0"/>
+            <a:ext cx="8708353" cy="45720"/>
+          </a:xfrm>
+          <a:prstGeom prst="rect">
+            <a:avLst/>
+          </a:prstGeom>
+          <a:solidFill>
+            <a:srgbClr val="4B6936"/>
+          </a:solidFill>
+          <a:ln>
+            <a:noFill/>
+          </a:ln>
+          <a:effectLst/>
+        </p:spPr>
+        <p:style>
+          <a:lnRef idx="1">
+            <a:schemeClr val="accent1"/>
+          </a:lnRef>
+          <a:fillRef idx="3">
+            <a:schemeClr val="accent1"/>
+          </a:fillRef>
+          <a:effectRef idx="2">
+            <a:schemeClr val="accent1"/>
+          </a:effectRef>
+          <a:fontRef idx="minor">
+            <a:schemeClr val="lt1"/>
+          </a:fontRef>
+        </p:style>
+        <p:txBody>
+          <a:bodyPr rtlCol="0" anchor="ctr"/>
+          <a:lstStyle/>
+          <a:p>
+            <a:pPr algn="ctr"/>
+          </a:p>
+        </p:txBody>
+      </p:sp>
+      <p:sp>
+        <p:nvSpPr>
+          <p:cNvPr id="3" name="TextBox 2"/>
+          <p:cNvSpPr txBox="1"/>
+          <p:nvPr/>
+        </p:nvSpPr>
+        <p:spPr>
+          <a:xfrm>
+            <a:off x="10561320" y="274320"/>
+            <a:ext cx="914400" cy="274320"/>
+          </a:xfrm>
+          <a:prstGeom prst="rect">
+            <a:avLst/>
+          </a:prstGeom>
+          <a:noFill/>
+        </p:spPr>
+        <p:txBody>
+          <a:bodyPr wrap="square" lIns="0" rIns="0" tIns="0" bIns="0" anchor="t">
+            <a:spAutoFit/>
+          </a:bodyPr>
+          <a:lstStyle/>
+          <a:p>
+            <a:pPr algn="r">
+              <a:lnSpc>
+                <a:spcPct val="115000"/>
+              </a:lnSpc>
+              <a:spcAft>
+                <a:spcPts val="0"/>
+              </a:spcAft>
+            </a:pPr>
+            <a:r>
+              <a:rPr sz="1000" b="0">
+                <a:solidFill>
+                  <a:srgbClr val="7A7566"/>
+                </a:solidFill>
+                <a:latin typeface="Apple SD Gothic Neo"/>
+                <a:ea typeface="Apple SD Gothic Neo"/>
+                <a:cs typeface="Apple SD Gothic Neo"/>
+              </a:rPr>
+              <a:t>10 / 14</a:t>
+            </a:r>
+          </a:p>
+        </p:txBody>
+      </p:sp>
+      <p:sp>
+        <p:nvSpPr>
+          <p:cNvPr id="4" name="TextBox 3"/>
+          <p:cNvSpPr txBox="1"/>
+          <p:nvPr/>
+        </p:nvSpPr>
+        <p:spPr>
+          <a:xfrm>
+            <a:off x="731520" y="685800"/>
+            <a:ext cx="7315200" cy="320040"/>
+          </a:xfrm>
+          <a:prstGeom prst="rect">
+            <a:avLst/>
+          </a:prstGeom>
+          <a:noFill/>
+        </p:spPr>
+        <p:txBody>
+          <a:bodyPr wrap="square" lIns="0" rIns="0" tIns="0" bIns="0" anchor="t">
+            <a:spAutoFit/>
+          </a:bodyPr>
+          <a:lstStyle/>
+          <a:p>
+            <a:pPr algn="l">
+              <a:lnSpc>
+                <a:spcPct val="115000"/>
+              </a:lnSpc>
+              <a:spcAft>
+                <a:spcPts val="0"/>
+              </a:spcAft>
+            </a:pPr>
+            <a:r>
+              <a:rPr sz="1200" b="1">
+                <a:solidFill>
+                  <a:srgbClr val="4B6936"/>
+                </a:solidFill>
+                <a:latin typeface="Apple SD Gothic Neo"/>
+                <a:ea typeface="Apple SD Gothic Neo"/>
+                <a:cs typeface="Apple SD Gothic Neo"/>
+              </a:rPr>
+              <a:t>여덟 · 처음 여는 분께</a:t>
+            </a:r>
+          </a:p>
+        </p:txBody>
+      </p:sp>
+      <p:sp>
+        <p:nvSpPr>
+          <p:cNvPr id="5" name="TextBox 4"/>
+          <p:cNvSpPr txBox="1"/>
+          <p:nvPr/>
+        </p:nvSpPr>
+        <p:spPr>
+          <a:xfrm>
+            <a:off x="731520" y="1051560"/>
+            <a:ext cx="10515600" cy="731520"/>
+          </a:xfrm>
+          <a:prstGeom prst="rect">
+            <a:avLst/>
+          </a:prstGeom>
+          <a:noFill/>
+        </p:spPr>
+        <p:txBody>
+          <a:bodyPr wrap="square" lIns="0" rIns="0" tIns="0" bIns="0" anchor="t">
+            <a:spAutoFit/>
+          </a:bodyPr>
+          <a:lstStyle/>
+          <a:p>
+            <a:pPr algn="l">
+              <a:lnSpc>
+                <a:spcPct val="115000"/>
+              </a:lnSpc>
+              <a:spcAft>
+                <a:spcPts val="0"/>
+              </a:spcAft>
+            </a:pPr>
+            <a:r>
+              <a:rPr sz="3000" b="1">
+                <a:solidFill>
+                  <a:srgbClr val="282621"/>
+                </a:solidFill>
+                <a:latin typeface="Apple SD Gothic Neo"/>
+                <a:ea typeface="Apple SD Gothic Neo"/>
+                <a:cs typeface="Apple SD Gothic Neo"/>
+              </a:rPr>
+              <a:t>손가락이 눌러 가며, 목소리로 읽어 줍니다</a:t>
+            </a:r>
+          </a:p>
+        </p:txBody>
+      </p:sp>
+      <p:sp>
+        <p:nvSpPr>
+          <p:cNvPr id="6" name="Rectangle 5"/>
+          <p:cNvSpPr/>
+          <p:nvPr/>
+        </p:nvSpPr>
+        <p:spPr>
+          <a:xfrm>
+            <a:off x="731520" y="2148840"/>
+            <a:ext cx="4160520" cy="54864"/>
+          </a:xfrm>
+          <a:prstGeom prst="rect">
+            <a:avLst/>
+          </a:prstGeom>
+          <a:solidFill>
+            <a:srgbClr val="4B6936"/>
+          </a:solidFill>
+          <a:ln>
+            <a:noFill/>
+          </a:ln>
+          <a:effectLst/>
+        </p:spPr>
+        <p:style>
+          <a:lnRef idx="1">
+            <a:schemeClr val="accent1"/>
+          </a:lnRef>
+          <a:fillRef idx="3">
+            <a:schemeClr val="accent1"/>
+          </a:fillRef>
+          <a:effectRef idx="2">
+            <a:schemeClr val="accent1"/>
+          </a:effectRef>
+          <a:fontRef idx="minor">
+            <a:schemeClr val="lt1"/>
+          </a:fontRef>
+        </p:style>
+        <p:txBody>
+          <a:bodyPr rtlCol="0" anchor="ctr"/>
+          <a:lstStyle/>
+          <a:p>
+            <a:pPr algn="ctr"/>
+          </a:p>
+        </p:txBody>
+      </p:sp>
+      <p:sp>
+        <p:nvSpPr>
+          <p:cNvPr id="7" name="TextBox 6"/>
+          <p:cNvSpPr txBox="1"/>
+          <p:nvPr/>
+        </p:nvSpPr>
+        <p:spPr>
+          <a:xfrm>
+            <a:off x="731520" y="2377440"/>
+            <a:ext cx="4160520" cy="3291840"/>
+          </a:xfrm>
+          <a:prstGeom prst="rect">
+            <a:avLst/>
+          </a:prstGeom>
+          <a:noFill/>
+        </p:spPr>
+        <p:txBody>
+          <a:bodyPr wrap="square" lIns="0" rIns="0" tIns="0" bIns="0" anchor="t">
+            <a:spAutoFit/>
+          </a:bodyPr>
+          <a:lstStyle/>
+          <a:p>
+            <a:pPr algn="l">
+              <a:lnSpc>
+                <a:spcPct val="130000"/>
+              </a:lnSpc>
+              <a:spcAft>
+                <a:spcPts val="1000"/>
+              </a:spcAft>
+            </a:pPr>
+            <a:r>
+              <a:rPr sz="2100" b="1">
+                <a:solidFill>
+                  <a:srgbClr val="324326"/>
+                </a:solidFill>
+                <a:latin typeface="Apple SD Gothic Neo"/>
+                <a:ea typeface="Apple SD Gothic Neo"/>
+                <a:cs typeface="Apple SD Gothic Neo"/>
+              </a:rPr>
+              <a:t>움직이는 사용법</a:t>
+            </a:r>
+          </a:p>
+          <a:p>
+            <a:pPr algn="l">
+              <a:lnSpc>
+                <a:spcPct val="130000"/>
+              </a:lnSpc>
+              <a:spcAft>
+                <a:spcPts val="600"/>
+              </a:spcAft>
+            </a:pPr>
+            <a:r>
+              <a:rPr sz="1300" b="0">
+                <a:solidFill>
+                  <a:srgbClr val="48453C"/>
+                </a:solidFill>
+                <a:latin typeface="Apple SD Gothic Neo"/>
+                <a:ea typeface="Apple SD Gothic Neo"/>
+                <a:cs typeface="Apple SD Gothic Neo"/>
+              </a:rPr>
+              <a:t>· 처음 등록부터 몸 상태가 달라졌을 때까지 6장 17장면</a:t>
+            </a:r>
+          </a:p>
+          <a:p>
+            <a:pPr algn="l">
+              <a:lnSpc>
+                <a:spcPct val="130000"/>
+              </a:lnSpc>
+              <a:spcAft>
+                <a:spcPts val="600"/>
+              </a:spcAft>
+            </a:pPr>
+            <a:r>
+              <a:rPr sz="1300" b="0">
+                <a:solidFill>
+                  <a:srgbClr val="48453C"/>
+                </a:solidFill>
+                <a:latin typeface="Apple SD Gothic Neo"/>
+                <a:ea typeface="Apple SD Gothic Neo"/>
+                <a:cs typeface="Apple SD Gothic Neo"/>
+              </a:rPr>
+              <a:t>· 내가 고르고 나머지를 추천받는 법도</a:t>
+            </a:r>
+          </a:p>
+          <a:p>
+            <a:pPr algn="l">
+              <a:lnSpc>
+                <a:spcPct val="130000"/>
+              </a:lnSpc>
+              <a:spcAft>
+                <a:spcPts val="600"/>
+              </a:spcAft>
+            </a:pPr>
+            <a:r>
+              <a:rPr sz="1300" b="0">
+                <a:solidFill>
+                  <a:srgbClr val="48453C"/>
+                </a:solidFill>
+                <a:latin typeface="Apple SD Gothic Neo"/>
+                <a:ea typeface="Apple SD Gothic Neo"/>
+                <a:cs typeface="Apple SD Gothic Neo"/>
+              </a:rPr>
+              <a:t>· 화면을 본뜬 그림 위를 손 모양이 눌러 감</a:t>
+            </a:r>
+          </a:p>
+          <a:p>
+            <a:pPr algn="l">
+              <a:lnSpc>
+                <a:spcPct val="130000"/>
+              </a:lnSpc>
+              <a:spcAft>
+                <a:spcPts val="600"/>
+              </a:spcAft>
+            </a:pPr>
+            <a:r>
+              <a:rPr sz="1300" b="0">
+                <a:solidFill>
+                  <a:srgbClr val="48453C"/>
+                </a:solidFill>
+                <a:latin typeface="Apple SD Gothic Neo"/>
+                <a:ea typeface="Apple SD Gothic Neo"/>
+                <a:cs typeface="Apple SD Gothic Neo"/>
+              </a:rPr>
+              <a:t>· 가이드 → 사용법, 로그인 화면에서도</a:t>
+            </a:r>
+          </a:p>
+        </p:txBody>
+      </p:sp>
+      <p:sp>
+        <p:nvSpPr>
+          <p:cNvPr id="8" name="Rectangle 7"/>
+          <p:cNvSpPr/>
+          <p:nvPr/>
+        </p:nvSpPr>
+        <p:spPr>
+          <a:xfrm>
+            <a:off x="5212080" y="2148840"/>
+            <a:ext cx="2971800" cy="54864"/>
+          </a:xfrm>
+          <a:prstGeom prst="rect">
+            <a:avLst/>
+          </a:prstGeom>
+          <a:solidFill>
+            <a:srgbClr val="E2DFD3"/>
+          </a:solidFill>
+          <a:ln>
+            <a:noFill/>
+          </a:ln>
+          <a:effectLst/>
+        </p:spPr>
+        <p:style>
+          <a:lnRef idx="1">
+            <a:schemeClr val="accent1"/>
+          </a:lnRef>
+          <a:fillRef idx="3">
+            <a:schemeClr val="accent1"/>
+          </a:fillRef>
+          <a:effectRef idx="2">
+            <a:schemeClr val="accent1"/>
+          </a:effectRef>
+          <a:fontRef idx="minor">
+            <a:schemeClr val="lt1"/>
+          </a:fontRef>
+        </p:style>
+        <p:txBody>
+          <a:bodyPr rtlCol="0" anchor="ctr"/>
+          <a:lstStyle/>
+          <a:p>
+            <a:pPr algn="ctr"/>
+          </a:p>
+        </p:txBody>
+      </p:sp>
+      <p:sp>
+        <p:nvSpPr>
+          <p:cNvPr id="9" name="TextBox 8"/>
+          <p:cNvSpPr txBox="1"/>
+          <p:nvPr/>
+        </p:nvSpPr>
+        <p:spPr>
+          <a:xfrm>
+            <a:off x="5212080" y="2377440"/>
+            <a:ext cx="2971800" cy="3291840"/>
+          </a:xfrm>
+          <a:prstGeom prst="rect">
+            <a:avLst/>
+          </a:prstGeom>
+          <a:noFill/>
+        </p:spPr>
+        <p:txBody>
+          <a:bodyPr wrap="square" lIns="0" rIns="0" tIns="0" bIns="0" anchor="t">
+            <a:spAutoFit/>
+          </a:bodyPr>
+          <a:lstStyle/>
+          <a:p>
+            <a:pPr algn="l">
+              <a:lnSpc>
+                <a:spcPct val="130000"/>
+              </a:lnSpc>
+              <a:spcAft>
+                <a:spcPts val="1000"/>
+              </a:spcAft>
+            </a:pPr>
+            <a:r>
+              <a:rPr sz="1700" b="1">
+                <a:solidFill>
+                  <a:srgbClr val="282621"/>
+                </a:solidFill>
+                <a:latin typeface="Apple SD Gothic Neo"/>
+                <a:ea typeface="Apple SD Gothic Neo"/>
+                <a:cs typeface="Apple SD Gothic Neo"/>
+              </a:rPr>
+              <a:t>음성 안내</a:t>
+            </a:r>
+          </a:p>
+          <a:p>
+            <a:pPr algn="l">
+              <a:lnSpc>
+                <a:spcPct val="130000"/>
+              </a:lnSpc>
+              <a:spcAft>
+                <a:spcPts val="600"/>
+              </a:spcAft>
+            </a:pPr>
+            <a:r>
+              <a:rPr sz="1300" b="0">
+                <a:solidFill>
+                  <a:srgbClr val="48453C"/>
+                </a:solidFill>
+                <a:latin typeface="Apple SD Gothic Neo"/>
+                <a:ea typeface="Apple SD Gothic Neo"/>
+                <a:cs typeface="Apple SD Gothic Neo"/>
+              </a:rPr>
+              <a:t>자막 65개를 신경망 음성으로 녹음해 어느 기기에서나 같은 목소리로 읽어 줍니다.</a:t>
+            </a:r>
+          </a:p>
+          <a:p>
+            <a:pPr algn="l">
+              <a:lnSpc>
+                <a:spcPct val="130000"/>
+              </a:lnSpc>
+              <a:spcAft>
+                <a:spcPts val="600"/>
+              </a:spcAft>
+            </a:pPr>
+            <a:r>
+              <a:rPr sz="1300" b="0">
+                <a:solidFill>
+                  <a:srgbClr val="48453C"/>
+                </a:solidFill>
+                <a:latin typeface="Apple SD Gothic Neo"/>
+                <a:ea typeface="Apple SD Gothic Neo"/>
+                <a:cs typeface="Apple SD Gothic Neo"/>
+              </a:rPr>
+              <a:t>읽기가 끝나야 다음으로 넘어갑니다.</a:t>
+            </a:r>
+          </a:p>
+        </p:txBody>
+      </p:sp>
+      <p:sp>
+        <p:nvSpPr>
+          <p:cNvPr id="10" name="Rectangle 9"/>
+          <p:cNvSpPr/>
+          <p:nvPr/>
+        </p:nvSpPr>
+        <p:spPr>
+          <a:xfrm>
+            <a:off x="8458200" y="2148840"/>
+            <a:ext cx="2999232" cy="54864"/>
+          </a:xfrm>
+          <a:prstGeom prst="rect">
+            <a:avLst/>
+          </a:prstGeom>
+          <a:solidFill>
+            <a:srgbClr val="E2DFD3"/>
+          </a:solidFill>
+          <a:ln>
+            <a:noFill/>
+          </a:ln>
+          <a:effectLst/>
+        </p:spPr>
+        <p:style>
+          <a:lnRef idx="1">
+            <a:schemeClr val="accent1"/>
+          </a:lnRef>
+          <a:fillRef idx="3">
+            <a:schemeClr val="accent1"/>
+          </a:fillRef>
+          <a:effectRef idx="2">
+            <a:schemeClr val="accent1"/>
+          </a:effectRef>
+          <a:fontRef idx="minor">
+            <a:schemeClr val="lt1"/>
+          </a:fontRef>
+        </p:style>
+        <p:txBody>
+          <a:bodyPr rtlCol="0" anchor="ctr"/>
+          <a:lstStyle/>
+          <a:p>
+            <a:pPr algn="ctr"/>
+          </a:p>
+        </p:txBody>
+      </p:sp>
+      <p:sp>
+        <p:nvSpPr>
+          <p:cNvPr id="11" name="TextBox 10"/>
+          <p:cNvSpPr txBox="1"/>
+          <p:nvPr/>
+        </p:nvSpPr>
+        <p:spPr>
+          <a:xfrm>
+            <a:off x="8458200" y="2377440"/>
+            <a:ext cx="2999232" cy="3291840"/>
+          </a:xfrm>
+          <a:prstGeom prst="rect">
+            <a:avLst/>
+          </a:prstGeom>
+          <a:noFill/>
+        </p:spPr>
+        <p:txBody>
+          <a:bodyPr wrap="square" lIns="0" rIns="0" tIns="0" bIns="0" anchor="t">
+            <a:spAutoFit/>
+          </a:bodyPr>
+          <a:lstStyle/>
+          <a:p>
+            <a:pPr algn="l">
+              <a:lnSpc>
+                <a:spcPct val="130000"/>
+              </a:lnSpc>
+              <a:spcAft>
+                <a:spcPts val="1000"/>
+              </a:spcAft>
+            </a:pPr>
+            <a:r>
+              <a:rPr sz="1700" b="1">
+                <a:solidFill>
+                  <a:srgbClr val="282621"/>
+                </a:solidFill>
+                <a:latin typeface="Apple SD Gothic Neo"/>
+                <a:ea typeface="Apple SD Gothic Neo"/>
+                <a:cs typeface="Apple SD Gothic Neo"/>
+              </a:rPr>
+              <a:t>알레르기 · 글자 크기</a:t>
+            </a:r>
+          </a:p>
+          <a:p>
+            <a:pPr algn="l">
+              <a:lnSpc>
+                <a:spcPct val="130000"/>
+              </a:lnSpc>
+              <a:spcAft>
+                <a:spcPts val="600"/>
+              </a:spcAft>
+            </a:pPr>
+            <a:r>
+              <a:rPr sz="1300" b="0">
+                <a:solidFill>
+                  <a:srgbClr val="48453C"/>
+                </a:solidFill>
+                <a:latin typeface="Apple SD Gothic Neo"/>
+                <a:ea typeface="Apple SD Gothic Neo"/>
+                <a:cs typeface="Apple SD Gothic Neo"/>
+              </a:rPr>
+              <a:t>이름만이 아니라 식약처 품목제조보고 원재료로 시판 제품 174,048건을 확인합니다.</a:t>
+            </a:r>
+          </a:p>
+          <a:p>
+            <a:pPr algn="l">
+              <a:lnSpc>
+                <a:spcPct val="130000"/>
+              </a:lnSpc>
+              <a:spcAft>
+                <a:spcPts val="600"/>
+              </a:spcAft>
+            </a:pPr>
+            <a:r>
+              <a:rPr sz="1300" b="0">
+                <a:solidFill>
+                  <a:srgbClr val="48453C"/>
+                </a:solidFill>
+                <a:latin typeface="Apple SD Gothic Neo"/>
+                <a:ea typeface="Apple SD Gothic Neo"/>
+                <a:cs typeface="Apple SD Gothic Neo"/>
+              </a:rPr>
+              <a:t>글자는 내 정보에서 더 크게로 키웁니다.</a:t>
+            </a:r>
+          </a:p>
+        </p:txBody>
+      </p:sp>
+      <p:sp>
+        <p:nvSpPr>
+          <p:cNvPr id="12" name="Rectangle 11"/>
+          <p:cNvSpPr/>
+          <p:nvPr/>
+        </p:nvSpPr>
+        <p:spPr>
+          <a:xfrm>
+            <a:off x="731520" y="6236208"/>
+            <a:ext cx="10725912" cy="10972"/>
+          </a:xfrm>
+          <a:prstGeom prst="rect">
+            <a:avLst/>
+          </a:prstGeom>
+          <a:solidFill>
+            <a:srgbClr val="E2DFD3"/>
+          </a:solidFill>
+          <a:ln>
+            <a:noFill/>
+          </a:ln>
+          <a:effectLst/>
+        </p:spPr>
+        <p:style>
+          <a:lnRef idx="1">
+            <a:schemeClr val="accent1"/>
+          </a:lnRef>
+          <a:fillRef idx="3">
+            <a:schemeClr val="accent1"/>
+          </a:fillRef>
+          <a:effectRef idx="2">
+            <a:schemeClr val="accent1"/>
+          </a:effectRef>
+          <a:fontRef idx="minor">
+            <a:schemeClr val="lt1"/>
+          </a:fontRef>
+        </p:style>
+        <p:txBody>
+          <a:bodyPr rtlCol="0" anchor="ctr"/>
+          <a:lstStyle/>
+          <a:p>
+            <a:pPr algn="ctr"/>
+          </a:p>
+        </p:txBody>
+      </p:sp>
+      <p:sp>
+        <p:nvSpPr>
+          <p:cNvPr id="13" name="TextBox 12"/>
+          <p:cNvSpPr txBox="1"/>
+          <p:nvPr/>
+        </p:nvSpPr>
+        <p:spPr>
+          <a:xfrm>
+            <a:off x="731520" y="6327648"/>
+            <a:ext cx="1828800" cy="274320"/>
+          </a:xfrm>
+          <a:prstGeom prst="rect">
+            <a:avLst/>
+          </a:prstGeom>
+          <a:noFill/>
+        </p:spPr>
+        <p:txBody>
+          <a:bodyPr wrap="square" lIns="0" rIns="0" tIns="0" bIns="0" anchor="t">
+            <a:spAutoFit/>
+          </a:bodyPr>
+          <a:lstStyle/>
+          <a:p>
+            <a:pPr algn="l">
+              <a:lnSpc>
+                <a:spcPct val="115000"/>
+              </a:lnSpc>
+              <a:spcAft>
+                <a:spcPts val="0"/>
+              </a:spcAft>
+            </a:pPr>
+            <a:r>
+              <a:rPr sz="1000" b="1">
+                <a:solidFill>
+                  <a:srgbClr val="4B6936"/>
+                </a:solidFill>
+                <a:latin typeface="Apple SD Gothic Neo"/>
+                <a:ea typeface="Apple SD Gothic Neo"/>
+                <a:cs typeface="Apple SD Gothic Neo"/>
+              </a:rPr>
+              <a:t>하루차림</a:t>
+            </a:r>
+          </a:p>
+        </p:txBody>
+      </p:sp>
+      <p:sp>
+        <p:nvSpPr>
+          <p:cNvPr id="14" name="TextBox 13"/>
+          <p:cNvSpPr txBox="1"/>
+          <p:nvPr/>
+        </p:nvSpPr>
+        <p:spPr>
+          <a:xfrm>
+            <a:off x="2560320" y="6327648"/>
+            <a:ext cx="8897112" cy="274320"/>
+          </a:xfrm>
+          <a:prstGeom prst="rect">
+            <a:avLst/>
+          </a:prstGeom>
+          <a:noFill/>
+        </p:spPr>
+        <p:txBody>
+          <a:bodyPr wrap="square" lIns="0" rIns="0" tIns="0" bIns="0" anchor="t">
+            <a:spAutoFit/>
+          </a:bodyPr>
+          <a:lstStyle/>
+          <a:p>
+            <a:pPr algn="r">
+              <a:lnSpc>
+                <a:spcPct val="115000"/>
+              </a:lnSpc>
+              <a:spcAft>
+                <a:spcPts val="0"/>
+              </a:spcAft>
+            </a:pPr>
+            <a:r>
+              <a:rPr sz="1000" b="0">
+                <a:solidFill>
+                  <a:srgbClr val="7A7566"/>
+                </a:solidFill>
+                <a:latin typeface="Apple SD Gothic Neo"/>
+                <a:ea typeface="Apple SD Gothic Neo"/>
+                <a:cs typeface="Apple SD Gothic Neo"/>
+              </a:rPr>
+              <a:t>2026년 10월에 더한 것</a:t>
+            </a:r>
+          </a:p>
+        </p:txBody>
+      </p:sp>
+    </p:spTree>
+  </p:cSld>
+  <p:clrMapOvr>
+    <a:masterClrMapping/>
+  </p:clrMapOvr>
+</p:sld>
+</file>
+
 <file path=ppt/slides/slide2.xml><?xml version="1.0" encoding="utf-8"?>
 <p:sld xmlns:a="http://schemas.openxmlformats.org/drawingml/2006/main" xmlns:p="http://schemas.openxmlformats.org/presentationml/2006/main" xmlns:r="http://schemas.openxmlformats.org/officeDocument/2006/relationships">
   <p:cSld>
@@ -6437,7 +7955,7 @@
         <p:spPr>
           <a:xfrm>
             <a:off x="0" y="0"/>
-            <a:ext cx="2031949" cy="45720"/>
+            <a:ext cx="1741670" cy="45720"/>
           </a:xfrm>
           <a:prstGeom prst="rect">
             <a:avLst/>
@@ -6511,7 +8029,7 @@
                 <a:ea typeface="Apple SD Gothic Neo"/>
                 <a:cs typeface="Apple SD Gothic Neo"/>
               </a:rPr>
-              <a:t>02 / 12</a:t>
+              <a:t>02 / 14</a:t>
             </a:r>
           </a:p>
         </p:txBody>
@@ -7022,7 +8540,7 @@
         <p:spPr>
           <a:xfrm>
             <a:off x="0" y="0"/>
-            <a:ext cx="3047923" cy="45720"/>
+            <a:ext cx="2612506" cy="45720"/>
           </a:xfrm>
           <a:prstGeom prst="rect">
             <a:avLst/>
@@ -7096,7 +8614,7 @@
                 <a:ea typeface="Apple SD Gothic Neo"/>
                 <a:cs typeface="Apple SD Gothic Neo"/>
               </a:rPr>
-              <a:t>03 / 12</a:t>
+              <a:t>03 / 14</a:t>
             </a:r>
           </a:p>
         </p:txBody>
@@ -8378,7 +9896,7 @@
         <p:spPr>
           <a:xfrm>
             <a:off x="0" y="0"/>
-            <a:ext cx="4063898" cy="45720"/>
+            <a:ext cx="3483341" cy="45720"/>
           </a:xfrm>
           <a:prstGeom prst="rect">
             <a:avLst/>
@@ -8452,7 +9970,7 @@
                 <a:ea typeface="Apple SD Gothic Neo"/>
                 <a:cs typeface="Apple SD Gothic Neo"/>
               </a:rPr>
-              <a:t>04 / 12</a:t>
+              <a:t>04 / 14</a:t>
             </a:r>
           </a:p>
         </p:txBody>
@@ -8540,7 +10058,7 @@
                 <a:ea typeface="Apple SD Gothic Neo"/>
                 <a:cs typeface="Apple SD Gothic Neo"/>
               </a:rPr>
-              <a:t>6</a:t>
+              <a:t>7</a:t>
             </a:r>
             <a:r>
               <a:rPr sz="2600" b="1">
@@ -9431,7 +10949,86 @@
                 <a:ea typeface="Apple SD Gothic Neo"/>
                 <a:cs typeface="Apple SD Gothic Neo"/>
               </a:rPr>
-              <a:t>src/engine — menu · rules · nutrition · ingredientVerdict · supplementAdvice · dayScore</a:t>
+              <a:t>src/engine — menu · rules · nutrition · ingredientVerdict · supplementAdvice · dayScore · plan</a:t>
+            </a:r>
+          </a:p>
+        </p:txBody>
+      </p:sp>
+      <p:sp>
+        <p:nvSpPr>
+          <p:cNvPr id="14" name="Rounded Rectangle 13"/>
+          <p:cNvSpPr/>
+          <p:nvPr/>
+        </p:nvSpPr>
+        <p:spPr>
+          <a:xfrm>
+            <a:off x="3514725" y="5476875"/>
+            <a:ext cx="2880360" cy="666750"/>
+          </a:xfrm>
+          <a:prstGeom prst="roundRect">
+            <a:avLst>
+              <a:gd name="adj" fmla="val 14000"/>
+            </a:avLst>
+          </a:prstGeom>
+          <a:solidFill>
+            <a:srgbClr val="EEF2E6"/>
+          </a:solidFill>
+          <a:ln>
+            <a:noFill/>
+          </a:ln>
+          <a:effectLst/>
+        </p:spPr>
+        <p:style>
+          <a:lnRef idx="1">
+            <a:schemeClr val="accent1"/>
+          </a:lnRef>
+          <a:fillRef idx="3">
+            <a:schemeClr val="accent1"/>
+          </a:fillRef>
+          <a:effectRef idx="2">
+            <a:schemeClr val="accent1"/>
+          </a:effectRef>
+          <a:fontRef idx="minor">
+            <a:schemeClr val="lt1"/>
+          </a:fontRef>
+        </p:style>
+        <p:txBody>
+          <a:bodyPr rtlCol="0" anchor="ctr" wrap="square" lIns="128016" rIns="128016" tIns="54864" bIns="54864"/>
+          <a:lstStyle/>
+          <a:p>
+            <a:pPr algn="l">
+              <a:spcAft>
+                <a:spcPts val="100"/>
+              </a:spcAft>
+            </a:pPr>
+            <a:r>
+              <a:rPr sz="1500" b="1">
+                <a:solidFill>
+                  <a:srgbClr val="324326"/>
+                </a:solidFill>
+                <a:latin typeface="Apple SD Gothic Neo"/>
+                <a:ea typeface="Apple SD Gothic Neo"/>
+                <a:cs typeface="Apple SD Gothic Neo"/>
+              </a:rPr>
+              <a:t>며칠치 계획</a:t>
+            </a:r>
+          </a:p>
+          <a:p>
+            <a:pPr algn="l">
+              <a:spcAft>
+                <a:spcPts val="0"/>
+              </a:spcAft>
+            </a:pPr>
+            <a:r>
+              <a:rPr sz="1050" b="0">
+                <a:solidFill>
+                  <a:srgbClr val="48453C"/>
+                </a:solidFill>
+                <a:latin typeface="Apple SD Gothic Neo"/>
+                <a:ea typeface="Apple SD Gothic Neo"/>
+                <a:cs typeface="Apple SD Gothic Neo"/>
+              </a:rPr>
+              <a:t>닷새까지 날을 잇고 재료를 모아 장보기로</a:t>
             </a:r>
           </a:p>
         </p:txBody>
@@ -9993,7 +11590,7 @@
         <p:spPr>
           <a:xfrm>
             <a:off x="0" y="0"/>
-            <a:ext cx="5079873" cy="45720"/>
+            <a:ext cx="4354176" cy="45720"/>
           </a:xfrm>
           <a:prstGeom prst="rect">
             <a:avLst/>
@@ -10067,7 +11664,7 @@
                 <a:ea typeface="Apple SD Gothic Neo"/>
                 <a:cs typeface="Apple SD Gothic Neo"/>
               </a:rPr>
-              <a:t>05 / 12</a:t>
+              <a:t>05 / 14</a:t>
             </a:r>
           </a:p>
         </p:txBody>
@@ -12365,7 +13962,7 @@
         <p:spPr>
           <a:xfrm>
             <a:off x="0" y="0"/>
-            <a:ext cx="6095847" cy="45720"/>
+            <a:ext cx="5225012" cy="45720"/>
           </a:xfrm>
           <a:prstGeom prst="rect">
             <a:avLst/>
@@ -12439,7 +14036,7 @@
                 <a:ea typeface="Apple SD Gothic Neo"/>
                 <a:cs typeface="Apple SD Gothic Neo"/>
               </a:rPr>
-              <a:t>06 / 12</a:t>
+              <a:t>06 / 14</a:t>
             </a:r>
           </a:p>
         </p:txBody>
@@ -13068,7 +14665,7 @@
                 <a:ea typeface="Apple SD Gothic Neo"/>
                 <a:cs typeface="Apple SD Gothic Neo"/>
               </a:rPr>
-              <a:t>검사 24종이 고칠 때마다 돕니다. 검사는 앱이 쓰는 기준을 빌리지 않고 따로 세웁니다 — 같은 기준으로 재면 같이 틀리기 때문입니다.</a:t>
+              <a:t>검사 32종이 고칠 때마다 돕니다. 검사는 앱이 쓰는 기준을 빌리지 않고 따로 세웁니다 — 같은 기준으로 재면 같이 틀리기 때문입니다.</a:t>
             </a:r>
           </a:p>
         </p:txBody>
@@ -13656,7 +15253,7 @@
         <p:spPr>
           <a:xfrm>
             <a:off x="0" y="0"/>
-            <a:ext cx="7111822" cy="45720"/>
+            <a:ext cx="6095847" cy="45720"/>
           </a:xfrm>
           <a:prstGeom prst="rect">
             <a:avLst/>
@@ -13730,7 +15327,7 @@
                 <a:ea typeface="Apple SD Gothic Neo"/>
                 <a:cs typeface="Apple SD Gothic Neo"/>
               </a:rPr>
-              <a:t>07 / 12</a:t>
+              <a:t>07 / 14</a:t>
             </a:r>
           </a:p>
         </p:txBody>
@@ -14848,7 +16445,7 @@
         <p:spPr>
           <a:xfrm>
             <a:off x="0" y="0"/>
-            <a:ext cx="8127796" cy="45720"/>
+            <a:ext cx="6966682" cy="45720"/>
           </a:xfrm>
           <a:prstGeom prst="rect">
             <a:avLst/>
@@ -14922,7 +16519,7 @@
                 <a:ea typeface="Apple SD Gothic Neo"/>
                 <a:cs typeface="Apple SD Gothic Neo"/>
               </a:rPr>
-              <a:t>08 / 12</a:t>
+              <a:t>08 / 14</a:t>
             </a:r>
           </a:p>
         </p:txBody>
@@ -15805,7 +17402,7 @@
         <p:spPr>
           <a:xfrm>
             <a:off x="0" y="0"/>
-            <a:ext cx="9143771" cy="45720"/>
+            <a:ext cx="9579188" cy="45720"/>
           </a:xfrm>
           <a:prstGeom prst="rect">
             <a:avLst/>
@@ -15879,7 +17476,7 @@
                 <a:ea typeface="Apple SD Gothic Neo"/>
                 <a:cs typeface="Apple SD Gothic Neo"/>
               </a:rPr>
-              <a:t>09 / 12</a:t>
+              <a:t>11 / 14</a:t>
             </a:r>
           </a:p>
         </p:txBody>
@@ -15923,7 +17520,7 @@
                 <a:ea typeface="Apple SD Gothic Neo"/>
                 <a:cs typeface="Apple SD Gothic Neo"/>
               </a:rPr>
-              <a:t>일곱 · 무엇이 다른가</a:t>
+              <a:t>아홉 · 무엇이 다른가</a:t>
             </a:r>
           </a:p>
         </p:txBody>
@@ -15998,7 +17595,7 @@
                 <a:gridCol w="1353312"/>
                 <a:gridCol w="1353312"/>
               </a:tblGrid>
-              <a:tr h="522514">
+              <a:tr h="457200">
                 <a:tc>
                   <a:txBody>
                     <a:bodyPr/>
@@ -16150,7 +17747,7 @@
                   </a:tcPr>
                 </a:tc>
               </a:tr>
-              <a:tr h="522514">
+              <a:tr h="457200">
                 <a:tc>
                   <a:txBody>
                     <a:bodyPr/>
@@ -16302,7 +17899,7 @@
                   </a:tcPr>
                 </a:tc>
               </a:tr>
-              <a:tr h="522514">
+              <a:tr h="457200">
                 <a:tc>
                   <a:txBody>
                     <a:bodyPr/>
@@ -16454,7 +18051,7 @@
                   </a:tcPr>
                 </a:tc>
               </a:tr>
-              <a:tr h="522514">
+              <a:tr h="457200">
                 <a:tc>
                   <a:txBody>
                     <a:bodyPr/>
@@ -16606,7 +18203,7 @@
                   </a:tcPr>
                 </a:tc>
               </a:tr>
-              <a:tr h="522514">
+              <a:tr h="457200">
                 <a:tc>
                   <a:txBody>
                     <a:bodyPr/>
@@ -16758,7 +18355,7 @@
                   </a:tcPr>
                 </a:tc>
               </a:tr>
-              <a:tr h="522514">
+              <a:tr h="457200">
                 <a:tc>
                   <a:txBody>
                     <a:bodyPr/>
@@ -16910,7 +18507,159 @@
                   </a:tcPr>
                 </a:tc>
               </a:tr>
-              <a:tr h="522516">
+              <a:tr h="457200">
+                <a:tc>
+                  <a:txBody>
+                    <a:bodyPr/>
+                    <a:lstStyle/>
+                    <a:p>
+                      <a:pPr algn="l"/>
+                      <a:r>
+                        <a:rPr sz="1250" b="0">
+                          <a:solidFill>
+                            <a:srgbClr val="282621"/>
+                          </a:solidFill>
+                          <a:latin typeface="Apple SD Gothic Neo"/>
+                          <a:ea typeface="Apple SD Gothic Neo"/>
+                          <a:cs typeface="Apple SD Gothic Neo"/>
+                        </a:rPr>
+                        <a:t>닷새치 식단과 1인분 장보기 목록 · 냉장고용 식단표</a:t>
+                      </a:r>
+                    </a:p>
+                  </a:txBody>
+                  <a:tcPr marL="73152" marR="73152" anchor="ctr">
+                    <a:solidFill>
+                      <a:srgbClr val="FAF9F4"/>
+                    </a:solidFill>
+                  </a:tcPr>
+                </a:tc>
+                <a:tc>
+                  <a:txBody>
+                    <a:bodyPr/>
+                    <a:lstStyle/>
+                    <a:p>
+                      <a:pPr algn="ctr"/>
+                      <a:r>
+                        <a:rPr sz="1800" b="0">
+                          <a:solidFill>
+                            <a:srgbClr val="4B6936"/>
+                          </a:solidFill>
+                          <a:latin typeface="Apple SD Gothic Neo"/>
+                          <a:ea typeface="Apple SD Gothic Neo"/>
+                          <a:cs typeface="Apple SD Gothic Neo"/>
+                        </a:rPr>
+                        <a:t>○</a:t>
+                      </a:r>
+                    </a:p>
+                  </a:txBody>
+                  <a:tcPr marL="73152" marR="73152" anchor="ctr">
+                    <a:solidFill>
+                      <a:srgbClr val="FAF9F4"/>
+                    </a:solidFill>
+                  </a:tcPr>
+                </a:tc>
+                <a:tc>
+                  <a:txBody>
+                    <a:bodyPr/>
+                    <a:lstStyle/>
+                    <a:p>
+                      <a:pPr algn="ctr"/>
+                      <a:r>
+                        <a:rPr sz="1800" b="0">
+                          <a:solidFill>
+                            <a:srgbClr val="7A7566"/>
+                          </a:solidFill>
+                          <a:latin typeface="Apple SD Gothic Neo"/>
+                          <a:ea typeface="Apple SD Gothic Neo"/>
+                          <a:cs typeface="Apple SD Gothic Neo"/>
+                        </a:rPr>
+                        <a:t>○</a:t>
+                      </a:r>
+                    </a:p>
+                  </a:txBody>
+                  <a:tcPr marL="73152" marR="73152" anchor="ctr">
+                    <a:solidFill>
+                      <a:srgbClr val="FAF9F4"/>
+                    </a:solidFill>
+                  </a:tcPr>
+                </a:tc>
+                <a:tc>
+                  <a:txBody>
+                    <a:bodyPr/>
+                    <a:lstStyle/>
+                    <a:p>
+                      <a:pPr algn="ctr"/>
+                      <a:r>
+                        <a:rPr sz="1800" b="0">
+                          <a:solidFill>
+                            <a:srgbClr val="7A7566"/>
+                          </a:solidFill>
+                          <a:latin typeface="Apple SD Gothic Neo"/>
+                          <a:ea typeface="Apple SD Gothic Neo"/>
+                          <a:cs typeface="Apple SD Gothic Neo"/>
+                        </a:rPr>
+                        <a:t>●</a:t>
+                      </a:r>
+                    </a:p>
+                  </a:txBody>
+                  <a:tcPr marL="73152" marR="73152" anchor="ctr">
+                    <a:solidFill>
+                      <a:srgbClr val="FAF9F4"/>
+                    </a:solidFill>
+                  </a:tcPr>
+                </a:tc>
+                <a:tc>
+                  <a:txBody>
+                    <a:bodyPr/>
+                    <a:lstStyle/>
+                    <a:p>
+                      <a:pPr algn="ctr"/>
+                      <a:r>
+                        <a:rPr sz="1800" b="0">
+                          <a:solidFill>
+                            <a:srgbClr val="7A7566"/>
+                          </a:solidFill>
+                          <a:latin typeface="Apple SD Gothic Neo"/>
+                          <a:ea typeface="Apple SD Gothic Neo"/>
+                          <a:cs typeface="Apple SD Gothic Neo"/>
+                        </a:rPr>
+                        <a:t>◐</a:t>
+                      </a:r>
+                    </a:p>
+                  </a:txBody>
+                  <a:tcPr marL="73152" marR="73152" anchor="ctr">
+                    <a:solidFill>
+                      <a:srgbClr val="FAF9F4"/>
+                    </a:solidFill>
+                  </a:tcPr>
+                </a:tc>
+                <a:tc>
+                  <a:txBody>
+                    <a:bodyPr/>
+                    <a:lstStyle/>
+                    <a:p>
+                      <a:pPr algn="ctr"/>
+                      <a:r>
+                        <a:rPr sz="1800" b="0">
+                          <a:solidFill>
+                            <a:srgbClr val="4B6936"/>
+                          </a:solidFill>
+                          <a:latin typeface="Apple SD Gothic Neo"/>
+                          <a:ea typeface="Apple SD Gothic Neo"/>
+                          <a:cs typeface="Apple SD Gothic Neo"/>
+                        </a:rPr>
+                        <a:t>●</a:t>
+                      </a:r>
+                    </a:p>
+                  </a:txBody>
+                  <a:tcPr marL="73152" marR="73152" anchor="ctr">
+                    <a:solidFill>
+                      <a:srgbClr val="EEF2E6"/>
+                    </a:solidFill>
+                  </a:tcPr>
+                </a:tc>
+              </a:tr>
+              <a:tr h="457200">
                 <a:tc>
                   <a:txBody>
                     <a:bodyPr/>
